--- a/presentation/2026_WorldCup_ML_期末報告.pptx
+++ b/presentation/2026_WorldCup_ML_期末報告.pptx
@@ -206,37 +206,37 @@
                     <c:v>英格蘭</c:v>
                   </c:pt>
                   <c:pt idx="4">
-                    <c:v>比利時</c:v>
+                    <c:v>西班牙</c:v>
                   </c:pt>
                   <c:pt idx="5">
-                    <c:v>西班牙</c:v>
+                    <c:v>比利時</c:v>
                   </c:pt>
                   <c:pt idx="6">
                     <c:v>德國</c:v>
                   </c:pt>
                   <c:pt idx="7">
+                    <c:v>荷蘭</c:v>
+                  </c:pt>
+                  <c:pt idx="8">
                     <c:v>烏拉圭</c:v>
                   </c:pt>
-                  <c:pt idx="8">
-                    <c:v>荷蘭</c:v>
+                  <c:pt idx="9">
+                    <c:v>哥倫比亞</c:v>
                   </c:pt>
-                  <c:pt idx="9">
+                  <c:pt idx="10">
                     <c:v>葡萄牙</c:v>
                   </c:pt>
-                  <c:pt idx="10">
+                  <c:pt idx="11">
+                    <c:v>墨西哥</c:v>
+                  </c:pt>
+                  <c:pt idx="12">
                     <c:v>克羅埃西亞</c:v>
                   </c:pt>
-                  <c:pt idx="11">
-                    <c:v>哥倫比亞</c:v>
-                  </c:pt>
-                  <c:pt idx="12">
-                    <c:v>墨西哥</c:v>
-                  </c:pt>
                   <c:pt idx="13">
-                    <c:v>美國</c:v>
+                    <c:v>日本</c:v>
                   </c:pt>
                   <c:pt idx="14">
-                    <c:v>南韓</c:v>
+                    <c:v>瑞士</c:v>
                   </c:pt>
                 </c:lvl>
               </c:multiLvlStrCache>
@@ -249,49 +249,49 @@
                 <c:formatCode>General</c:formatCode>
                 <c:ptCount val="15"/>
                 <c:pt idx="0">
-                  <c:v>6.23</c:v>
+                  <c:v>6.6</c:v>
                 </c:pt>
                 <c:pt idx="1">
-                  <c:v>6.03</c:v>
+                  <c:v>6</c:v>
                 </c:pt>
                 <c:pt idx="2">
                   <c:v>5.28</c:v>
                 </c:pt>
                 <c:pt idx="3">
-                  <c:v>5.09</c:v>
+                  <c:v>5.08</c:v>
                 </c:pt>
                 <c:pt idx="4">
-                  <c:v>4.96</c:v>
+                  <c:v>4.95</c:v>
                 </c:pt>
                 <c:pt idx="5">
-                  <c:v>4.89</c:v>
+                  <c:v>4.18</c:v>
                 </c:pt>
                 <c:pt idx="6">
-                  <c:v>3.99</c:v>
+                  <c:v>4.03</c:v>
                 </c:pt>
                 <c:pt idx="7">
-                  <c:v>3.84</c:v>
+                  <c:v>3.93</c:v>
                 </c:pt>
                 <c:pt idx="8">
-                  <c:v>3.8</c:v>
+                  <c:v>3.85</c:v>
                 </c:pt>
                 <c:pt idx="9">
-                  <c:v>3.78</c:v>
+                  <c:v>3.67</c:v>
                 </c:pt>
                 <c:pt idx="10">
-                  <c:v>3</c:v>
+                  <c:v>3.64</c:v>
                 </c:pt>
                 <c:pt idx="11">
-                  <c:v>2.6</c:v>
+                  <c:v>3.05</c:v>
                 </c:pt>
                 <c:pt idx="12">
-                  <c:v>2.2</c:v>
+                  <c:v>2.77</c:v>
                 </c:pt>
                 <c:pt idx="13">
-                  <c:v>1.9</c:v>
+                  <c:v>2.65</c:v>
                 </c:pt>
                 <c:pt idx="14">
-                  <c:v>1.6</c:v>
+                  <c:v>2.61</c:v>
                 </c:pt>
               </c:numCache>
             </c:numRef>
@@ -7250,7 +7250,7 @@
                 <a:ea typeface="Calibri" pitchFamily="34" charset="-122"/>
                 <a:cs typeface="Calibri" pitchFamily="34" charset="-120"/>
               </a:rPr>
-              <a:t>52.0%</a:t>
+              <a:t>49.3%</a:t>
             </a:r>
             <a:endParaRPr lang="en-US" sz="1800" dirty="0"/>
           </a:p>
@@ -7446,7 +7446,7 @@
                 <a:ea typeface="Calibri" pitchFamily="34" charset="-122"/>
                 <a:cs typeface="Calibri" pitchFamily="34" charset="-120"/>
               </a:rPr>
-              <a:t>50.0%</a:t>
+              <a:t>51.6%</a:t>
             </a:r>
             <a:endParaRPr lang="en-US" sz="1800" dirty="0"/>
           </a:p>
@@ -7957,7 +7957,7 @@
                 <a:ea typeface="Calibri" pitchFamily="34" charset="-122"/>
                 <a:cs typeface="Calibri" pitchFamily="34" charset="-120"/>
               </a:rPr>
-              <a:t>51.7%</a:t>
+              <a:t>51.4%</a:t>
             </a:r>
             <a:pPr indent="0" marL="0">
               <a:buNone/>
@@ -7985,7 +7985,7 @@
                 <a:ea typeface="Calibri" pitchFamily="34" charset="-122"/>
                 <a:cs typeface="Calibri" pitchFamily="34" charset="-120"/>
               </a:rPr>
-              <a:t>顯著優於隨機 +18.4 個百分點</a:t>
+              <a:t>顯著優於隨機 +18.1 個百分點</a:t>
             </a:r>
             <a:endParaRPr lang="en-US" sz="1200" dirty="0"/>
           </a:p>
@@ -13640,7 +13640,7 @@
                 <a:ea typeface="Calibri" pitchFamily="34" charset="-122"/>
                 <a:cs typeface="Calibri" pitchFamily="34" charset="-120"/>
               </a:rPr>
-              <a:t>16 隊</a:t>
+              <a:t>15 隊</a:t>
             </a:r>
             <a:endParaRPr lang="en-US" sz="1100" dirty="0"/>
           </a:p>
@@ -13718,7 +13718,7 @@
                 <a:ea typeface="Calibri" pitchFamily="34" charset="-122"/>
                 <a:cs typeface="Calibri" pitchFamily="34" charset="-120"/>
               </a:rPr>
-              <a:t>Argentina · Brazil · France · Germany · England · Spain · Belgium · Portugal · Netherlands · Morocco · Norway · Iran · Japan · South Korea · Senegal · Algeria</a:t>
+              <a:t>Argentina · Brazil · France · Germany · England · Spain · Belgium · Portugal · Netherlands · Morocco · Norway · Iran · Japan · Senegal · Algeria</a:t>
             </a:r>
             <a:endParaRPr lang="en-US" sz="900" dirty="0"/>
           </a:p>
@@ -13879,7 +13879,7 @@
                 <a:ea typeface="Calibri" pitchFamily="34" charset="-122"/>
                 <a:cs typeface="Calibri" pitchFamily="34" charset="-120"/>
               </a:rPr>
-              <a:t>26 隊</a:t>
+              <a:t>27 隊</a:t>
             </a:r>
             <a:endParaRPr lang="en-US" sz="1100" dirty="0"/>
           </a:p>
@@ -13957,7 +13957,7 @@
                 <a:ea typeface="Calibri" pitchFamily="34" charset="-122"/>
                 <a:cs typeface="Calibri" pitchFamily="34" charset="-120"/>
               </a:rPr>
-              <a:t>Australia · Austria · Canada · Cape Verde · Colombia · Croatia · DR Congo · Ecuador · Egypt · Ghana · Haiti · Iraq · Ivory Coast · Jordan · Mexico · New Zealand · Panama · Qatar · Saudi Arabia · Scotland · South Africa · Sweden · Switzerland · Tunisia · Uruguay · Uzbekistan</a:t>
+              <a:t>Australia · Austria · Canada · Cape Verde · Colombia · Croatia · DR Congo · Ecuador · Egypt · Ghana · Haiti · Iraq · Ivory Coast · Jordan · Mexico · New Zealand · Panama · Qatar · Saudi Arabia · Scotland · South Africa · South Korea · Sweden · Switzerland · Tunisia · Uruguay · Uzbekistan</a:t>
             </a:r>
             <a:endParaRPr lang="en-US" sz="900" dirty="0"/>
           </a:p>
@@ -15034,7 +15034,7 @@
                           <a:ea typeface="Calibri" pitchFamily="34" charset="-122"/>
                           <a:cs typeface="Calibri" pitchFamily="34" charset="-120"/>
                         </a:rPr>
-                        <a:t>6.23%</a:t>
+                        <a:t>6.60%</a:t>
                       </a:r>
                       <a:endParaRPr lang="en-US" sz="1200" dirty="0">
                         <a:latin typeface="Calibri" charset="0"/>
@@ -15099,7 +15099,7 @@
                           <a:ea typeface="Calibri" pitchFamily="34" charset="-122"/>
                           <a:cs typeface="Calibri" pitchFamily="34" charset="-120"/>
                         </a:rPr>
-                        <a:t>17.8%</a:t>
+                        <a:t>18.7%</a:t>
                       </a:r>
                       <a:endParaRPr lang="en-US" sz="1200" dirty="0">
                         <a:latin typeface="Calibri" charset="0"/>
@@ -15164,7 +15164,7 @@
                           <a:ea typeface="Calibri" pitchFamily="34" charset="-122"/>
                           <a:cs typeface="Calibri" pitchFamily="34" charset="-120"/>
                         </a:rPr>
-                        <a:t>73.9%</a:t>
+                        <a:t>74.0%</a:t>
                       </a:r>
                       <a:endParaRPr lang="en-US" sz="1200" dirty="0">
                         <a:latin typeface="Calibri" charset="0"/>
@@ -15361,7 +15361,7 @@
                           <a:ea typeface="Calibri" pitchFamily="34" charset="-122"/>
                           <a:cs typeface="Calibri" pitchFamily="34" charset="-120"/>
                         </a:rPr>
-                        <a:t>6.03%</a:t>
+                        <a:t>6.00%</a:t>
                       </a:r>
                       <a:endParaRPr lang="en-US" sz="1200" dirty="0">
                         <a:latin typeface="Calibri" charset="0"/>
@@ -15426,7 +15426,7 @@
                           <a:ea typeface="Calibri" pitchFamily="34" charset="-122"/>
                           <a:cs typeface="Calibri" pitchFamily="34" charset="-120"/>
                         </a:rPr>
-                        <a:t>17.9%</a:t>
+                        <a:t>18.4%</a:t>
                       </a:r>
                       <a:endParaRPr lang="en-US" sz="1200" dirty="0">
                         <a:latin typeface="Calibri" charset="0"/>
@@ -15491,7 +15491,7 @@
                           <a:ea typeface="Calibri" pitchFamily="34" charset="-122"/>
                           <a:cs typeface="Calibri" pitchFamily="34" charset="-120"/>
                         </a:rPr>
-                        <a:t>74.9%</a:t>
+                        <a:t>75.4%</a:t>
                       </a:r>
                       <a:endParaRPr lang="en-US" sz="1200" dirty="0">
                         <a:latin typeface="Calibri" charset="0"/>
@@ -15753,7 +15753,7 @@
                           <a:ea typeface="Calibri" pitchFamily="34" charset="-122"/>
                           <a:cs typeface="Calibri" pitchFamily="34" charset="-120"/>
                         </a:rPr>
-                        <a:t>16.6%</a:t>
+                        <a:t>16.4%</a:t>
                       </a:r>
                       <a:endParaRPr lang="en-US" sz="1200" dirty="0">
                         <a:latin typeface="Calibri" charset="0"/>
@@ -15818,7 +15818,7 @@
                           <a:ea typeface="Calibri" pitchFamily="34" charset="-122"/>
                           <a:cs typeface="Calibri" pitchFamily="34" charset="-120"/>
                         </a:rPr>
-                        <a:t>73.1%</a:t>
+                        <a:t>73.6%</a:t>
                       </a:r>
                       <a:endParaRPr lang="en-US" sz="1200" dirty="0">
                         <a:latin typeface="Calibri" charset="0"/>
@@ -16015,7 +16015,7 @@
                           <a:ea typeface="Calibri" pitchFamily="34" charset="-122"/>
                           <a:cs typeface="Calibri" pitchFamily="34" charset="-120"/>
                         </a:rPr>
-                        <a:t>5.09%</a:t>
+                        <a:t>5.08%</a:t>
                       </a:r>
                       <a:endParaRPr lang="en-US" sz="1200" dirty="0">
                         <a:latin typeface="Calibri" charset="0"/>
@@ -16080,7 +16080,7 @@
                           <a:ea typeface="Calibri" pitchFamily="34" charset="-122"/>
                           <a:cs typeface="Calibri" pitchFamily="34" charset="-120"/>
                         </a:rPr>
-                        <a:t>16.3%</a:t>
+                        <a:t>16.1%</a:t>
                       </a:r>
                       <a:endParaRPr lang="en-US" sz="1200" dirty="0">
                         <a:latin typeface="Calibri" charset="0"/>
@@ -16145,7 +16145,7 @@
                           <a:ea typeface="Calibri" pitchFamily="34" charset="-122"/>
                           <a:cs typeface="Calibri" pitchFamily="34" charset="-120"/>
                         </a:rPr>
-                        <a:t>75.4%</a:t>
+                        <a:t>75.0%</a:t>
                       </a:r>
                       <a:endParaRPr lang="en-US" sz="1200" dirty="0">
                         <a:latin typeface="Calibri" charset="0"/>
@@ -16277,7 +16277,7 @@
                           <a:ea typeface="Calibri" pitchFamily="34" charset="-122"/>
                           <a:cs typeface="Calibri" pitchFamily="34" charset="-120"/>
                         </a:rPr>
-                        <a:t>🇧🇪 比利時   Belgium</a:t>
+                        <a:t>🇪🇸 西班牙   Spain</a:t>
                       </a:r>
                       <a:endParaRPr lang="en-US" sz="1200" dirty="0">
                         <a:latin typeface="Calibri" charset="0"/>
@@ -16342,7 +16342,7 @@
                           <a:ea typeface="Calibri" pitchFamily="34" charset="-122"/>
                           <a:cs typeface="Calibri" pitchFamily="34" charset="-120"/>
                         </a:rPr>
-                        <a:t>4.96%</a:t>
+                        <a:t>4.95%</a:t>
                       </a:r>
                       <a:endParaRPr lang="en-US" sz="1200" dirty="0">
                         <a:latin typeface="Calibri" charset="0"/>
@@ -16407,7 +16407,7 @@
                           <a:ea typeface="Calibri" pitchFamily="34" charset="-122"/>
                           <a:cs typeface="Calibri" pitchFamily="34" charset="-120"/>
                         </a:rPr>
-                        <a:t>15.7%</a:t>
+                        <a:t>15.4%</a:t>
                       </a:r>
                       <a:endParaRPr lang="en-US" sz="1200" dirty="0">
                         <a:latin typeface="Calibri" charset="0"/>
@@ -16472,7 +16472,7 @@
                           <a:ea typeface="Calibri" pitchFamily="34" charset="-122"/>
                           <a:cs typeface="Calibri" pitchFamily="34" charset="-120"/>
                         </a:rPr>
-                        <a:t>71.9%</a:t>
+                        <a:t>73.0%</a:t>
                       </a:r>
                       <a:endParaRPr lang="en-US" sz="1200" dirty="0">
                         <a:latin typeface="Calibri" charset="0"/>
@@ -16604,7 +16604,7 @@
                           <a:ea typeface="Calibri" pitchFamily="34" charset="-122"/>
                           <a:cs typeface="Calibri" pitchFamily="34" charset="-120"/>
                         </a:rPr>
-                        <a:t>🇪🇸 西班牙   Spain</a:t>
+                        <a:t>🇧🇪 比利時   Belgium</a:t>
                       </a:r>
                       <a:endParaRPr lang="en-US" sz="1200" dirty="0">
                         <a:latin typeface="Calibri" charset="0"/>
@@ -16669,7 +16669,7 @@
                           <a:ea typeface="Calibri" pitchFamily="34" charset="-122"/>
                           <a:cs typeface="Calibri" pitchFamily="34" charset="-120"/>
                         </a:rPr>
-                        <a:t>4.89%</a:t>
+                        <a:t>4.18%</a:t>
                       </a:r>
                       <a:endParaRPr lang="en-US" sz="1200" dirty="0">
                         <a:latin typeface="Calibri" charset="0"/>
@@ -16734,7 +16734,7 @@
                           <a:ea typeface="Calibri" pitchFamily="34" charset="-122"/>
                           <a:cs typeface="Calibri" pitchFamily="34" charset="-120"/>
                         </a:rPr>
-                        <a:t>15.6%</a:t>
+                        <a:t>15.0%</a:t>
                       </a:r>
                       <a:endParaRPr lang="en-US" sz="1200" dirty="0">
                         <a:latin typeface="Calibri" charset="0"/>
@@ -16799,7 +16799,7 @@
                           <a:ea typeface="Calibri" pitchFamily="34" charset="-122"/>
                           <a:cs typeface="Calibri" pitchFamily="34" charset="-120"/>
                         </a:rPr>
-                        <a:t>73.7%</a:t>
+                        <a:t>73.3%</a:t>
                       </a:r>
                       <a:endParaRPr lang="en-US" sz="1200" dirty="0">
                         <a:latin typeface="Calibri" charset="0"/>
@@ -16996,7 +16996,7 @@
                           <a:ea typeface="Calibri" pitchFamily="34" charset="-122"/>
                           <a:cs typeface="Calibri" pitchFamily="34" charset="-120"/>
                         </a:rPr>
-                        <a:t>3.99%</a:t>
+                        <a:t>4.03%</a:t>
                       </a:r>
                       <a:endParaRPr lang="en-US" sz="1200" dirty="0">
                         <a:latin typeface="Calibri" charset="0"/>
@@ -17061,7 +17061,7 @@
                           <a:ea typeface="Calibri" pitchFamily="34" charset="-122"/>
                           <a:cs typeface="Calibri" pitchFamily="34" charset="-120"/>
                         </a:rPr>
-                        <a:t>14.1%</a:t>
+                        <a:t>14.2%</a:t>
                       </a:r>
                       <a:endParaRPr lang="en-US" sz="1200" dirty="0">
                         <a:latin typeface="Calibri" charset="0"/>
@@ -17126,7 +17126,7 @@
                           <a:ea typeface="Calibri" pitchFamily="34" charset="-122"/>
                           <a:cs typeface="Calibri" pitchFamily="34" charset="-120"/>
                         </a:rPr>
-                        <a:t>70.8%</a:t>
+                        <a:t>72.2%</a:t>
                       </a:r>
                       <a:endParaRPr lang="en-US" sz="1200" dirty="0">
                         <a:latin typeface="Calibri" charset="0"/>
@@ -17258,7 +17258,7 @@
                           <a:ea typeface="Calibri" pitchFamily="34" charset="-122"/>
                           <a:cs typeface="Calibri" pitchFamily="34" charset="-120"/>
                         </a:rPr>
-                        <a:t>🇺🇾 烏拉圭   Uruguay</a:t>
+                        <a:t>🇳🇱 荷蘭   Netherlands</a:t>
                       </a:r>
                       <a:endParaRPr lang="en-US" sz="1200" dirty="0">
                         <a:latin typeface="Calibri" charset="0"/>
@@ -17323,7 +17323,7 @@
                           <a:ea typeface="Calibri" pitchFamily="34" charset="-122"/>
                           <a:cs typeface="Calibri" pitchFamily="34" charset="-120"/>
                         </a:rPr>
-                        <a:t>3.84%</a:t>
+                        <a:t>3.93%</a:t>
                       </a:r>
                       <a:endParaRPr lang="en-US" sz="1200" dirty="0">
                         <a:latin typeface="Calibri" charset="0"/>
@@ -17388,7 +17388,7 @@
                           <a:ea typeface="Calibri" pitchFamily="34" charset="-122"/>
                           <a:cs typeface="Calibri" pitchFamily="34" charset="-120"/>
                         </a:rPr>
-                        <a:t>13.3%</a:t>
+                        <a:t>14.3%</a:t>
                       </a:r>
                       <a:endParaRPr lang="en-US" sz="1200" dirty="0">
                         <a:latin typeface="Calibri" charset="0"/>
@@ -17453,7 +17453,7 @@
                           <a:ea typeface="Calibri" pitchFamily="34" charset="-122"/>
                           <a:cs typeface="Calibri" pitchFamily="34" charset="-120"/>
                         </a:rPr>
-                        <a:t>61.6%</a:t>
+                        <a:t>71.1%</a:t>
                       </a:r>
                       <a:endParaRPr lang="en-US" sz="1200" dirty="0">
                         <a:latin typeface="Calibri" charset="0"/>
@@ -17585,7 +17585,7 @@
                           <a:ea typeface="Calibri" pitchFamily="34" charset="-122"/>
                           <a:cs typeface="Calibri" pitchFamily="34" charset="-120"/>
                         </a:rPr>
-                        <a:t>🇳🇱 荷蘭   Netherlands</a:t>
+                        <a:t>🇺🇾 烏拉圭   Uruguay</a:t>
                       </a:r>
                       <a:endParaRPr lang="en-US" sz="1200" dirty="0">
                         <a:latin typeface="Calibri" charset="0"/>
@@ -17650,7 +17650,7 @@
                           <a:ea typeface="Calibri" pitchFamily="34" charset="-122"/>
                           <a:cs typeface="Calibri" pitchFamily="34" charset="-120"/>
                         </a:rPr>
-                        <a:t>3.80%</a:t>
+                        <a:t>3.85%</a:t>
                       </a:r>
                       <a:endParaRPr lang="en-US" sz="1200" dirty="0">
                         <a:latin typeface="Calibri" charset="0"/>
@@ -17715,7 +17715,7 @@
                           <a:ea typeface="Calibri" pitchFamily="34" charset="-122"/>
                           <a:cs typeface="Calibri" pitchFamily="34" charset="-120"/>
                         </a:rPr>
-                        <a:t>13.9%</a:t>
+                        <a:t>13.4%</a:t>
                       </a:r>
                       <a:endParaRPr lang="en-US" sz="1200" dirty="0">
                         <a:latin typeface="Calibri" charset="0"/>
@@ -17780,7 +17780,7 @@
                           <a:ea typeface="Calibri" pitchFamily="34" charset="-122"/>
                           <a:cs typeface="Calibri" pitchFamily="34" charset="-120"/>
                         </a:rPr>
-                        <a:t>71.0%</a:t>
+                        <a:t>62.5%</a:t>
                       </a:r>
                       <a:endParaRPr lang="en-US" sz="1200" dirty="0">
                         <a:latin typeface="Calibri" charset="0"/>
@@ -17912,7 +17912,7 @@
                           <a:ea typeface="Calibri" pitchFamily="34" charset="-122"/>
                           <a:cs typeface="Calibri" pitchFamily="34" charset="-120"/>
                         </a:rPr>
-                        <a:t>🇵🇹 葡萄牙   Portugal</a:t>
+                        <a:t>🇨🇴 哥倫比亞   Colombia</a:t>
                       </a:r>
                       <a:endParaRPr lang="en-US" sz="1200" dirty="0">
                         <a:latin typeface="Calibri" charset="0"/>
@@ -17977,7 +17977,7 @@
                           <a:ea typeface="Calibri" pitchFamily="34" charset="-122"/>
                           <a:cs typeface="Calibri" pitchFamily="34" charset="-120"/>
                         </a:rPr>
-                        <a:t>3.78%</a:t>
+                        <a:t>3.67%</a:t>
                       </a:r>
                       <a:endParaRPr lang="en-US" sz="1200" dirty="0">
                         <a:latin typeface="Calibri" charset="0"/>
@@ -18042,7 +18042,7 @@
                           <a:ea typeface="Calibri" pitchFamily="34" charset="-122"/>
                           <a:cs typeface="Calibri" pitchFamily="34" charset="-120"/>
                         </a:rPr>
-                        <a:t>13.4%</a:t>
+                        <a:t>13.2%</a:t>
                       </a:r>
                       <a:endParaRPr lang="en-US" sz="1200" dirty="0">
                         <a:latin typeface="Calibri" charset="0"/>
@@ -18107,7 +18107,7 @@
                           <a:ea typeface="Calibri" pitchFamily="34" charset="-122"/>
                           <a:cs typeface="Calibri" pitchFamily="34" charset="-120"/>
                         </a:rPr>
-                        <a:t>71.2%</a:t>
+                        <a:t>62.3%</a:t>
                       </a:r>
                       <a:endParaRPr lang="en-US" sz="1200" dirty="0">
                         <a:latin typeface="Calibri" charset="0"/>
@@ -19446,7 +19446,7 @@
                 <a:ea typeface="Georgia" pitchFamily="34" charset="-122"/>
                 <a:cs typeface="Georgia" pitchFamily="34" charset="-120"/>
               </a:rPr>
-              <a:t>KR vs CZ: λ_KR=1.50 &gt; λ_CZ=1.08 → MAP 1-0    |    KR vs SA: λ_KR=1.16 &gt; λ_SA=0.69 → MAP 1-0</a:t>
+              <a:t>KR vs CZ: λ_KR=1.87 &gt; λ_CZ=0.66 → MAP 1-0    |    KR vs SA: λ_KR=1.19 &gt; λ_SA=0.67 → MAP 1-0</a:t>
             </a:r>
             <a:endParaRPr lang="en-US" sz="1200" dirty="0"/>
           </a:p>
@@ -23565,7 +23565,7 @@
                 <a:ea typeface="Calibri" pitchFamily="34" charset="-122"/>
                 <a:cs typeface="Calibri" pitchFamily="34" charset="-120"/>
               </a:rPr>
-              <a:t>Walk-Forward 平均 51.7%，比隨機 33.3% 高 18.4 個百分點。費雪檢定 + 卡方檢定都拒絕「模型在亂猜」的虛無假設。</a:t>
+              <a:t>Walk-Forward 平均 51.4%，比隨機 33.3% 高 18.1 個百分點。費雪檢定 + 卡方檢定都拒絕「模型在亂猜」的虛無假設。</a:t>
             </a:r>
             <a:endParaRPr lang="en-US" sz="1100" dirty="0"/>
           </a:p>
@@ -23702,7 +23702,7 @@
                 <a:ea typeface="Calibri" pitchFamily="34" charset="-122"/>
                 <a:cs typeface="Calibri" pitchFamily="34" charset="-120"/>
               </a:rPr>
-              <a:t>巴西 6.23% / 阿根廷 6.03% / 法國 5.28% — 前 10 累計約 48%。符合世界盃高度不確定性的本質，沒有出現單一球隊獨大的失真。</a:t>
+              <a:t>巴西 6.60% / 阿根廷 6.00% / 法國 5.28% — 前 10 累計約 48%。符合世界盃高度不確定性的本質，沒有出現單一球隊獨大的失真。</a:t>
             </a:r>
             <a:endParaRPr lang="en-US" sz="1100" dirty="0"/>
           </a:p>
@@ -23800,7 +23800,7 @@
                 <a:ea typeface="Calibri" pitchFamily="34" charset="-122"/>
                 <a:cs typeface="Calibri" pitchFamily="34" charset="-120"/>
               </a:rPr>
-              <a:t>風格分群揭示 16 攻 26 平 6 守 結構</a:t>
+              <a:t>風格分群揭示 15 攻 27 平 6 守 結構</a:t>
             </a:r>
             <a:endParaRPr lang="en-US" sz="1600" dirty="0"/>
           </a:p>
@@ -23839,7 +23839,7 @@
                 <a:ea typeface="Calibri" pitchFamily="34" charset="-122"/>
                 <a:cs typeface="Calibri" pitchFamily="34" charset="-120"/>
               </a:rPr>
-              <a:t>K-Means 自動發現的分群與直覺一致：歐美/南美強隊多為攻擊型，東歐/亞洲球隊多為平衡或防守型。Silhouette 0.31 顯示適度可分。</a:t>
+              <a:t>K-Means 自動發現的分群與直覺一致：歐美/南美強隊多為攻擊型，東歐/亞洲球隊多為平衡或防守型。Silhouette 0.33 顯示適度可分。</a:t>
             </a:r>
             <a:endParaRPr lang="en-US" sz="1100" dirty="0"/>
           </a:p>
@@ -34260,7 +34260,7 @@
                 <a:ea typeface="Calibri" pitchFamily="34" charset="-122"/>
                 <a:cs typeface="Calibri" pitchFamily="34" charset="-120"/>
               </a:rPr>
-              <a:t>52.0%</a:t>
+              <a:t>49.3%</a:t>
             </a:r>
             <a:endParaRPr lang="en-US" sz="1200" dirty="0"/>
           </a:p>
@@ -34413,7 +34413,7 @@
                 <a:ea typeface="Calibri" pitchFamily="34" charset="-122"/>
                 <a:cs typeface="Calibri" pitchFamily="34" charset="-120"/>
               </a:rPr>
-              <a:t>50.0%</a:t>
+              <a:t>51.6%</a:t>
             </a:r>
             <a:endParaRPr lang="en-US" sz="1200" dirty="0"/>
           </a:p>
@@ -34820,7 +34820,7 @@
                 <a:ea typeface="Calibri" pitchFamily="34" charset="-122"/>
                 <a:cs typeface="Calibri" pitchFamily="34" charset="-120"/>
               </a:rPr>
-              <a:t>51.7%</a:t>
+              <a:t>51.4%</a:t>
             </a:r>
             <a:endParaRPr lang="en-US" sz="2800" dirty="0"/>
           </a:p>
@@ -34859,7 +34859,7 @@
                 <a:ea typeface="Calibri" pitchFamily="34" charset="-122"/>
                 <a:cs typeface="Calibri" pitchFamily="34" charset="-120"/>
               </a:rPr>
-              <a:t>vs 隨機猜測 33.3% · 提升 +18.4%</a:t>
+              <a:t>vs 隨機猜測 33.3% · 提升 +18.1%</a:t>
             </a:r>
             <a:endParaRPr lang="en-US" sz="1100" dirty="0"/>
           </a:p>

--- a/presentation/2026_WorldCup_ML_期末報告.pptx
+++ b/presentation/2026_WorldCup_ML_期末報告.pptx
@@ -194,16 +194,16 @@
                 <c:ptCount val="15"/>
                 <c:lvl>
                   <c:pt idx="0">
+                    <c:v>阿根廷</c:v>
+                  </c:pt>
+                  <c:pt idx="1">
                     <c:v>巴西</c:v>
                   </c:pt>
-                  <c:pt idx="1">
-                    <c:v>阿根廷</c:v>
-                  </c:pt>
                   <c:pt idx="2">
-                    <c:v>法國</c:v>
+                    <c:v>英格蘭</c:v>
                   </c:pt>
                   <c:pt idx="3">
-                    <c:v>英格蘭</c:v>
+                    <c:v>法國</c:v>
                   </c:pt>
                   <c:pt idx="4">
                     <c:v>西班牙</c:v>
@@ -212,28 +212,28 @@
                     <c:v>比利時</c:v>
                   </c:pt>
                   <c:pt idx="6">
-                    <c:v>德國</c:v>
+                    <c:v>葡萄牙</c:v>
                   </c:pt>
                   <c:pt idx="7">
                     <c:v>荷蘭</c:v>
                   </c:pt>
                   <c:pt idx="8">
-                    <c:v>烏拉圭</c:v>
+                    <c:v>德國</c:v>
                   </c:pt>
                   <c:pt idx="9">
                     <c:v>哥倫比亞</c:v>
                   </c:pt>
                   <c:pt idx="10">
-                    <c:v>葡萄牙</c:v>
+                    <c:v>烏拉圭</c:v>
                   </c:pt>
                   <c:pt idx="11">
-                    <c:v>墨西哥</c:v>
+                    <c:v>克羅埃西亞</c:v>
                   </c:pt>
                   <c:pt idx="12">
-                    <c:v>克羅埃西亞</c:v>
+                    <c:v>摩洛哥</c:v>
                   </c:pt>
                   <c:pt idx="13">
-                    <c:v>日本</c:v>
+                    <c:v>墨西哥</c:v>
                   </c:pt>
                   <c:pt idx="14">
                     <c:v>瑞士</c:v>
@@ -249,49 +249,49 @@
                 <c:formatCode>General</c:formatCode>
                 <c:ptCount val="15"/>
                 <c:pt idx="0">
-                  <c:v>6.6</c:v>
+                  <c:v>6.14</c:v>
                 </c:pt>
                 <c:pt idx="1">
-                  <c:v>6</c:v>
+                  <c:v>6.01</c:v>
                 </c:pt>
                 <c:pt idx="2">
-                  <c:v>5.28</c:v>
+                  <c:v>5.8</c:v>
                 </c:pt>
                 <c:pt idx="3">
-                  <c:v>5.08</c:v>
+                  <c:v>5.75</c:v>
                 </c:pt>
                 <c:pt idx="4">
-                  <c:v>4.95</c:v>
+                  <c:v>5.01</c:v>
                 </c:pt>
                 <c:pt idx="5">
-                  <c:v>4.18</c:v>
+                  <c:v>4.99</c:v>
                 </c:pt>
                 <c:pt idx="6">
-                  <c:v>4.03</c:v>
+                  <c:v>4.65</c:v>
                 </c:pt>
                 <c:pt idx="7">
-                  <c:v>3.93</c:v>
+                  <c:v>4.62</c:v>
                 </c:pt>
                 <c:pt idx="8">
-                  <c:v>3.85</c:v>
+                  <c:v>4.44</c:v>
                 </c:pt>
                 <c:pt idx="9">
-                  <c:v>3.67</c:v>
+                  <c:v>3.41</c:v>
                 </c:pt>
                 <c:pt idx="10">
-                  <c:v>3.64</c:v>
+                  <c:v>3.39</c:v>
                 </c:pt>
                 <c:pt idx="11">
-                  <c:v>3.05</c:v>
+                  <c:v>3.3</c:v>
                 </c:pt>
                 <c:pt idx="12">
-                  <c:v>2.77</c:v>
+                  <c:v>2.89</c:v>
                 </c:pt>
                 <c:pt idx="13">
-                  <c:v>2.65</c:v>
+                  <c:v>2.78</c:v>
                 </c:pt>
                 <c:pt idx="14">
-                  <c:v>2.61</c:v>
+                  <c:v>2.57</c:v>
                 </c:pt>
               </c:numCache>
             </c:numRef>
@@ -7250,7 +7250,7 @@
                 <a:ea typeface="Calibri" pitchFamily="34" charset="-122"/>
                 <a:cs typeface="Calibri" pitchFamily="34" charset="-120"/>
               </a:rPr>
-              <a:t>49.3%</a:t>
+              <a:t>53.3%</a:t>
             </a:r>
             <a:endParaRPr lang="en-US" sz="1800" dirty="0"/>
           </a:p>
@@ -7446,7 +7446,7 @@
                 <a:ea typeface="Calibri" pitchFamily="34" charset="-122"/>
                 <a:cs typeface="Calibri" pitchFamily="34" charset="-120"/>
               </a:rPr>
-              <a:t>51.6%</a:t>
+              <a:t>48.4%</a:t>
             </a:r>
             <a:endParaRPr lang="en-US" sz="1800" dirty="0"/>
           </a:p>
@@ -7838,7 +7838,7 @@
                 <a:ea typeface="Calibri" pitchFamily="34" charset="-122"/>
                 <a:cs typeface="Calibri" pitchFamily="34" charset="-120"/>
               </a:rPr>
-              <a:t>54.7%</a:t>
+              <a:t>56.2%</a:t>
             </a:r>
             <a:endParaRPr lang="en-US" sz="1800" dirty="0"/>
           </a:p>
@@ -7957,7 +7957,7 @@
                 <a:ea typeface="Calibri" pitchFamily="34" charset="-122"/>
                 <a:cs typeface="Calibri" pitchFamily="34" charset="-120"/>
               </a:rPr>
-              <a:t>51.4%</a:t>
+              <a:t>52.0%</a:t>
             </a:r>
             <a:pPr indent="0" marL="0">
               <a:buNone/>
@@ -7985,7 +7985,7 @@
                 <a:ea typeface="Calibri" pitchFamily="34" charset="-122"/>
                 <a:cs typeface="Calibri" pitchFamily="34" charset="-120"/>
               </a:rPr>
-              <a:t>顯著優於隨機 +18.1 個百分點</a:t>
+              <a:t>顯著優於隨機 +18.7 個百分點</a:t>
             </a:r>
             <a:endParaRPr lang="en-US" sz="1200" dirty="0"/>
           </a:p>
@@ -14969,7 +14969,7 @@
                           <a:ea typeface="Calibri" pitchFamily="34" charset="-122"/>
                           <a:cs typeface="Calibri" pitchFamily="34" charset="-120"/>
                         </a:rPr>
-                        <a:t>🇧🇷 巴西   Brazil</a:t>
+                        <a:t>🇦🇷 阿根廷   Argentina</a:t>
                       </a:r>
                       <a:endParaRPr lang="en-US" sz="1200" dirty="0">
                         <a:latin typeface="Calibri" charset="0"/>
@@ -15034,7 +15034,7 @@
                           <a:ea typeface="Calibri" pitchFamily="34" charset="-122"/>
                           <a:cs typeface="Calibri" pitchFamily="34" charset="-120"/>
                         </a:rPr>
-                        <a:t>6.60%</a:t>
+                        <a:t>6.14%</a:t>
                       </a:r>
                       <a:endParaRPr lang="en-US" sz="1200" dirty="0">
                         <a:latin typeface="Calibri" charset="0"/>
@@ -15099,7 +15099,7 @@
                           <a:ea typeface="Calibri" pitchFamily="34" charset="-122"/>
                           <a:cs typeface="Calibri" pitchFamily="34" charset="-120"/>
                         </a:rPr>
-                        <a:t>18.7%</a:t>
+                        <a:t>18.4%</a:t>
                       </a:r>
                       <a:endParaRPr lang="en-US" sz="1200" dirty="0">
                         <a:latin typeface="Calibri" charset="0"/>
@@ -15164,7 +15164,7 @@
                           <a:ea typeface="Calibri" pitchFamily="34" charset="-122"/>
                           <a:cs typeface="Calibri" pitchFamily="34" charset="-120"/>
                         </a:rPr>
-                        <a:t>74.0%</a:t>
+                        <a:t>77.6%</a:t>
                       </a:r>
                       <a:endParaRPr lang="en-US" sz="1200" dirty="0">
                         <a:latin typeface="Calibri" charset="0"/>
@@ -15296,7 +15296,7 @@
                           <a:ea typeface="Calibri" pitchFamily="34" charset="-122"/>
                           <a:cs typeface="Calibri" pitchFamily="34" charset="-120"/>
                         </a:rPr>
-                        <a:t>🇦🇷 阿根廷   Argentina</a:t>
+                        <a:t>🇧🇷 巴西   Brazil</a:t>
                       </a:r>
                       <a:endParaRPr lang="en-US" sz="1200" dirty="0">
                         <a:latin typeface="Calibri" charset="0"/>
@@ -15361,7 +15361,7 @@
                           <a:ea typeface="Calibri" pitchFamily="34" charset="-122"/>
                           <a:cs typeface="Calibri" pitchFamily="34" charset="-120"/>
                         </a:rPr>
-                        <a:t>6.00%</a:t>
+                        <a:t>6.01%</a:t>
                       </a:r>
                       <a:endParaRPr lang="en-US" sz="1200" dirty="0">
                         <a:latin typeface="Calibri" charset="0"/>
@@ -15426,7 +15426,7 @@
                           <a:ea typeface="Calibri" pitchFamily="34" charset="-122"/>
                           <a:cs typeface="Calibri" pitchFamily="34" charset="-120"/>
                         </a:rPr>
-                        <a:t>18.4%</a:t>
+                        <a:t>18.8%</a:t>
                       </a:r>
                       <a:endParaRPr lang="en-US" sz="1200" dirty="0">
                         <a:latin typeface="Calibri" charset="0"/>
@@ -15491,7 +15491,7 @@
                           <a:ea typeface="Calibri" pitchFamily="34" charset="-122"/>
                           <a:cs typeface="Calibri" pitchFamily="34" charset="-120"/>
                         </a:rPr>
-                        <a:t>75.4%</a:t>
+                        <a:t>77.5%</a:t>
                       </a:r>
                       <a:endParaRPr lang="en-US" sz="1200" dirty="0">
                         <a:latin typeface="Calibri" charset="0"/>
@@ -15623,7 +15623,7 @@
                           <a:ea typeface="Calibri" pitchFamily="34" charset="-122"/>
                           <a:cs typeface="Calibri" pitchFamily="34" charset="-120"/>
                         </a:rPr>
-                        <a:t>🇫🇷 法國   France</a:t>
+                        <a:t>🏴󠁧󠁢󠁥󠁮󠁧󠁿 英格蘭   England</a:t>
                       </a:r>
                       <a:endParaRPr lang="en-US" sz="1200" dirty="0">
                         <a:latin typeface="Calibri" charset="0"/>
@@ -15688,7 +15688,7 @@
                           <a:ea typeface="Calibri" pitchFamily="34" charset="-122"/>
                           <a:cs typeface="Calibri" pitchFamily="34" charset="-120"/>
                         </a:rPr>
-                        <a:t>5.28%</a:t>
+                        <a:t>5.80%</a:t>
                       </a:r>
                       <a:endParaRPr lang="en-US" sz="1200" dirty="0">
                         <a:latin typeface="Calibri" charset="0"/>
@@ -15753,7 +15753,7 @@
                           <a:ea typeface="Calibri" pitchFamily="34" charset="-122"/>
                           <a:cs typeface="Calibri" pitchFamily="34" charset="-120"/>
                         </a:rPr>
-                        <a:t>16.4%</a:t>
+                        <a:t>18.1%</a:t>
                       </a:r>
                       <a:endParaRPr lang="en-US" sz="1200" dirty="0">
                         <a:latin typeface="Calibri" charset="0"/>
@@ -15818,7 +15818,7 @@
                           <a:ea typeface="Calibri" pitchFamily="34" charset="-122"/>
                           <a:cs typeface="Calibri" pitchFamily="34" charset="-120"/>
                         </a:rPr>
-                        <a:t>73.6%</a:t>
+                        <a:t>76.2%</a:t>
                       </a:r>
                       <a:endParaRPr lang="en-US" sz="1200" dirty="0">
                         <a:latin typeface="Calibri" charset="0"/>
@@ -15950,7 +15950,7 @@
                           <a:ea typeface="Calibri" pitchFamily="34" charset="-122"/>
                           <a:cs typeface="Calibri" pitchFamily="34" charset="-120"/>
                         </a:rPr>
-                        <a:t>🏴󠁧󠁢󠁥󠁮󠁧󠁿 英格蘭   England</a:t>
+                        <a:t>🇫🇷 法國   France</a:t>
                       </a:r>
                       <a:endParaRPr lang="en-US" sz="1200" dirty="0">
                         <a:latin typeface="Calibri" charset="0"/>
@@ -16015,7 +16015,7 @@
                           <a:ea typeface="Calibri" pitchFamily="34" charset="-122"/>
                           <a:cs typeface="Calibri" pitchFamily="34" charset="-120"/>
                         </a:rPr>
-                        <a:t>5.08%</a:t>
+                        <a:t>5.75%</a:t>
                       </a:r>
                       <a:endParaRPr lang="en-US" sz="1200" dirty="0">
                         <a:latin typeface="Calibri" charset="0"/>
@@ -16080,7 +16080,7 @@
                           <a:ea typeface="Calibri" pitchFamily="34" charset="-122"/>
                           <a:cs typeface="Calibri" pitchFamily="34" charset="-120"/>
                         </a:rPr>
-                        <a:t>16.1%</a:t>
+                        <a:t>18.6%</a:t>
                       </a:r>
                       <a:endParaRPr lang="en-US" sz="1200" dirty="0">
                         <a:latin typeface="Calibri" charset="0"/>
@@ -16145,7 +16145,7 @@
                           <a:ea typeface="Calibri" pitchFamily="34" charset="-122"/>
                           <a:cs typeface="Calibri" pitchFamily="34" charset="-120"/>
                         </a:rPr>
-                        <a:t>75.0%</a:t>
+                        <a:t>76.8%</a:t>
                       </a:r>
                       <a:endParaRPr lang="en-US" sz="1200" dirty="0">
                         <a:latin typeface="Calibri" charset="0"/>
@@ -16342,7 +16342,7 @@
                           <a:ea typeface="Calibri" pitchFamily="34" charset="-122"/>
                           <a:cs typeface="Calibri" pitchFamily="34" charset="-120"/>
                         </a:rPr>
-                        <a:t>4.95%</a:t>
+                        <a:t>5.01%</a:t>
                       </a:r>
                       <a:endParaRPr lang="en-US" sz="1200" dirty="0">
                         <a:latin typeface="Calibri" charset="0"/>
@@ -16407,7 +16407,7 @@
                           <a:ea typeface="Calibri" pitchFamily="34" charset="-122"/>
                           <a:cs typeface="Calibri" pitchFamily="34" charset="-120"/>
                         </a:rPr>
-                        <a:t>15.4%</a:t>
+                        <a:t>16.7%</a:t>
                       </a:r>
                       <a:endParaRPr lang="en-US" sz="1200" dirty="0">
                         <a:latin typeface="Calibri" charset="0"/>
@@ -16472,7 +16472,7 @@
                           <a:ea typeface="Calibri" pitchFamily="34" charset="-122"/>
                           <a:cs typeface="Calibri" pitchFamily="34" charset="-120"/>
                         </a:rPr>
-                        <a:t>73.0%</a:t>
+                        <a:t>76.0%</a:t>
                       </a:r>
                       <a:endParaRPr lang="en-US" sz="1200" dirty="0">
                         <a:latin typeface="Calibri" charset="0"/>
@@ -16669,7 +16669,7 @@
                           <a:ea typeface="Calibri" pitchFamily="34" charset="-122"/>
                           <a:cs typeface="Calibri" pitchFamily="34" charset="-120"/>
                         </a:rPr>
-                        <a:t>4.18%</a:t>
+                        <a:t>4.99%</a:t>
                       </a:r>
                       <a:endParaRPr lang="en-US" sz="1200" dirty="0">
                         <a:latin typeface="Calibri" charset="0"/>
@@ -16734,7 +16734,7 @@
                           <a:ea typeface="Calibri" pitchFamily="34" charset="-122"/>
                           <a:cs typeface="Calibri" pitchFamily="34" charset="-120"/>
                         </a:rPr>
-                        <a:t>15.0%</a:t>
+                        <a:t>16.4%</a:t>
                       </a:r>
                       <a:endParaRPr lang="en-US" sz="1200" dirty="0">
                         <a:latin typeface="Calibri" charset="0"/>
@@ -16799,7 +16799,7 @@
                           <a:ea typeface="Calibri" pitchFamily="34" charset="-122"/>
                           <a:cs typeface="Calibri" pitchFamily="34" charset="-120"/>
                         </a:rPr>
-                        <a:t>73.3%</a:t>
+                        <a:t>76.5%</a:t>
                       </a:r>
                       <a:endParaRPr lang="en-US" sz="1200" dirty="0">
                         <a:latin typeface="Calibri" charset="0"/>
@@ -16931,7 +16931,7 @@
                           <a:ea typeface="Calibri" pitchFamily="34" charset="-122"/>
                           <a:cs typeface="Calibri" pitchFamily="34" charset="-120"/>
                         </a:rPr>
-                        <a:t>🇩🇪 德國   Germany</a:t>
+                        <a:t>🇵🇹 葡萄牙   Portugal</a:t>
                       </a:r>
                       <a:endParaRPr lang="en-US" sz="1200" dirty="0">
                         <a:latin typeface="Calibri" charset="0"/>
@@ -16996,7 +16996,7 @@
                           <a:ea typeface="Calibri" pitchFamily="34" charset="-122"/>
                           <a:cs typeface="Calibri" pitchFamily="34" charset="-120"/>
                         </a:rPr>
-                        <a:t>4.03%</a:t>
+                        <a:t>4.65%</a:t>
                       </a:r>
                       <a:endParaRPr lang="en-US" sz="1200" dirty="0">
                         <a:latin typeface="Calibri" charset="0"/>
@@ -17061,7 +17061,7 @@
                           <a:ea typeface="Calibri" pitchFamily="34" charset="-122"/>
                           <a:cs typeface="Calibri" pitchFamily="34" charset="-120"/>
                         </a:rPr>
-                        <a:t>14.2%</a:t>
+                        <a:t>15.6%</a:t>
                       </a:r>
                       <a:endParaRPr lang="en-US" sz="1200" dirty="0">
                         <a:latin typeface="Calibri" charset="0"/>
@@ -17126,7 +17126,7 @@
                           <a:ea typeface="Calibri" pitchFamily="34" charset="-122"/>
                           <a:cs typeface="Calibri" pitchFamily="34" charset="-120"/>
                         </a:rPr>
-                        <a:t>72.2%</a:t>
+                        <a:t>75.8%</a:t>
                       </a:r>
                       <a:endParaRPr lang="en-US" sz="1200" dirty="0">
                         <a:latin typeface="Calibri" charset="0"/>
@@ -17323,7 +17323,7 @@
                           <a:ea typeface="Calibri" pitchFamily="34" charset="-122"/>
                           <a:cs typeface="Calibri" pitchFamily="34" charset="-120"/>
                         </a:rPr>
-                        <a:t>3.93%</a:t>
+                        <a:t>4.62%</a:t>
                       </a:r>
                       <a:endParaRPr lang="en-US" sz="1200" dirty="0">
                         <a:latin typeface="Calibri" charset="0"/>
@@ -17388,7 +17388,7 @@
                           <a:ea typeface="Calibri" pitchFamily="34" charset="-122"/>
                           <a:cs typeface="Calibri" pitchFamily="34" charset="-120"/>
                         </a:rPr>
-                        <a:t>14.3%</a:t>
+                        <a:t>15.6%</a:t>
                       </a:r>
                       <a:endParaRPr lang="en-US" sz="1200" dirty="0">
                         <a:latin typeface="Calibri" charset="0"/>
@@ -17453,7 +17453,7 @@
                           <a:ea typeface="Calibri" pitchFamily="34" charset="-122"/>
                           <a:cs typeface="Calibri" pitchFamily="34" charset="-120"/>
                         </a:rPr>
-                        <a:t>71.1%</a:t>
+                        <a:t>72.8%</a:t>
                       </a:r>
                       <a:endParaRPr lang="en-US" sz="1200" dirty="0">
                         <a:latin typeface="Calibri" charset="0"/>
@@ -17585,7 +17585,7 @@
                           <a:ea typeface="Calibri" pitchFamily="34" charset="-122"/>
                           <a:cs typeface="Calibri" pitchFamily="34" charset="-120"/>
                         </a:rPr>
-                        <a:t>🇺🇾 烏拉圭   Uruguay</a:t>
+                        <a:t>🇩🇪 德國   Germany</a:t>
                       </a:r>
                       <a:endParaRPr lang="en-US" sz="1200" dirty="0">
                         <a:latin typeface="Calibri" charset="0"/>
@@ -17650,7 +17650,7 @@
                           <a:ea typeface="Calibri" pitchFamily="34" charset="-122"/>
                           <a:cs typeface="Calibri" pitchFamily="34" charset="-120"/>
                         </a:rPr>
-                        <a:t>3.85%</a:t>
+                        <a:t>4.44%</a:t>
                       </a:r>
                       <a:endParaRPr lang="en-US" sz="1200" dirty="0">
                         <a:latin typeface="Calibri" charset="0"/>
@@ -17715,7 +17715,7 @@
                           <a:ea typeface="Calibri" pitchFamily="34" charset="-122"/>
                           <a:cs typeface="Calibri" pitchFamily="34" charset="-120"/>
                         </a:rPr>
-                        <a:t>13.4%</a:t>
+                        <a:t>15.8%</a:t>
                       </a:r>
                       <a:endParaRPr lang="en-US" sz="1200" dirty="0">
                         <a:latin typeface="Calibri" charset="0"/>
@@ -17780,7 +17780,7 @@
                           <a:ea typeface="Calibri" pitchFamily="34" charset="-122"/>
                           <a:cs typeface="Calibri" pitchFamily="34" charset="-120"/>
                         </a:rPr>
-                        <a:t>62.5%</a:t>
+                        <a:t>76.2%</a:t>
                       </a:r>
                       <a:endParaRPr lang="en-US" sz="1200" dirty="0">
                         <a:latin typeface="Calibri" charset="0"/>
@@ -17977,7 +17977,7 @@
                           <a:ea typeface="Calibri" pitchFamily="34" charset="-122"/>
                           <a:cs typeface="Calibri" pitchFamily="34" charset="-120"/>
                         </a:rPr>
-                        <a:t>3.67%</a:t>
+                        <a:t>3.41%</a:t>
                       </a:r>
                       <a:endParaRPr lang="en-US" sz="1200" dirty="0">
                         <a:latin typeface="Calibri" charset="0"/>
@@ -18042,7 +18042,7 @@
                           <a:ea typeface="Calibri" pitchFamily="34" charset="-122"/>
                           <a:cs typeface="Calibri" pitchFamily="34" charset="-120"/>
                         </a:rPr>
-                        <a:t>13.2%</a:t>
+                        <a:t>12.2%</a:t>
                       </a:r>
                       <a:endParaRPr lang="en-US" sz="1200" dirty="0">
                         <a:latin typeface="Calibri" charset="0"/>
@@ -18107,7 +18107,7 @@
                           <a:ea typeface="Calibri" pitchFamily="34" charset="-122"/>
                           <a:cs typeface="Calibri" pitchFamily="34" charset="-120"/>
                         </a:rPr>
-                        <a:t>62.3%</a:t>
+                        <a:t>62.4%</a:t>
                       </a:r>
                       <a:endParaRPr lang="en-US" sz="1200" dirty="0">
                         <a:latin typeface="Calibri" charset="0"/>
@@ -23565,7 +23565,7 @@
                 <a:ea typeface="Calibri" pitchFamily="34" charset="-122"/>
                 <a:cs typeface="Calibri" pitchFamily="34" charset="-120"/>
               </a:rPr>
-              <a:t>Walk-Forward 平均 51.4%，比隨機 33.3% 高 18.1 個百分點。費雪檢定 + 卡方檢定都拒絕「模型在亂猜」的虛無假設。</a:t>
+              <a:t>Walk-Forward 平均 52.0%，比隨機 33.3% 高 18.7 個百分點。費雪檢定 + 卡方檢定都拒絕「模型在亂猜」的虛無假設。</a:t>
             </a:r>
             <a:endParaRPr lang="en-US" sz="1100" dirty="0"/>
           </a:p>
@@ -23702,7 +23702,7 @@
                 <a:ea typeface="Calibri" pitchFamily="34" charset="-122"/>
                 <a:cs typeface="Calibri" pitchFamily="34" charset="-120"/>
               </a:rPr>
-              <a:t>巴西 6.60% / 阿根廷 6.00% / 法國 5.28% — 前 10 累計約 48%。符合世界盃高度不確定性的本質，沒有出現單一球隊獨大的失真。</a:t>
+              <a:t>阿根廷 6.14% / 巴西 6.01% / 英格蘭 5.80% / 法國 5.75% — 前 10 累計約 50%。符合世界盃高度不確定性的本質，沒有出現單一球隊獨大的失真。</a:t>
             </a:r>
             <a:endParaRPr lang="en-US" sz="1100" dirty="0"/>
           </a:p>
@@ -34260,7 +34260,7 @@
                 <a:ea typeface="Calibri" pitchFamily="34" charset="-122"/>
                 <a:cs typeface="Calibri" pitchFamily="34" charset="-120"/>
               </a:rPr>
-              <a:t>49.3%</a:t>
+              <a:t>53.3%</a:t>
             </a:r>
             <a:endParaRPr lang="en-US" sz="1200" dirty="0"/>
           </a:p>
@@ -34413,7 +34413,7 @@
                 <a:ea typeface="Calibri" pitchFamily="34" charset="-122"/>
                 <a:cs typeface="Calibri" pitchFamily="34" charset="-120"/>
               </a:rPr>
-              <a:t>51.6%</a:t>
+              <a:t>48.4%</a:t>
             </a:r>
             <a:endParaRPr lang="en-US" sz="1200" dirty="0"/>
           </a:p>
@@ -34719,7 +34719,7 @@
                 <a:ea typeface="Calibri" pitchFamily="34" charset="-122"/>
                 <a:cs typeface="Calibri" pitchFamily="34" charset="-120"/>
               </a:rPr>
-              <a:t>54.7%</a:t>
+              <a:t>56.2%</a:t>
             </a:r>
             <a:endParaRPr lang="en-US" sz="1200" dirty="0"/>
           </a:p>
@@ -34820,7 +34820,7 @@
                 <a:ea typeface="Calibri" pitchFamily="34" charset="-122"/>
                 <a:cs typeface="Calibri" pitchFamily="34" charset="-120"/>
               </a:rPr>
-              <a:t>51.4%</a:t>
+              <a:t>52.0%</a:t>
             </a:r>
             <a:endParaRPr lang="en-US" sz="2800" dirty="0"/>
           </a:p>
@@ -34859,7 +34859,7 @@
                 <a:ea typeface="Calibri" pitchFamily="34" charset="-122"/>
                 <a:cs typeface="Calibri" pitchFamily="34" charset="-120"/>
               </a:rPr>
-              <a:t>vs 隨機猜測 33.3% · 提升 +18.1%</a:t>
+              <a:t>vs 隨機猜測 33.3% · 提升 +18.7%</a:t>
             </a:r>
             <a:endParaRPr lang="en-US" sz="1100" dirty="0"/>
           </a:p>

--- a/presentation/2026_WorldCup_ML_期末報告.pptx
+++ b/presentation/2026_WorldCup_ML_期末報告.pptx
@@ -200,10 +200,10 @@
                     <c:v>巴西</c:v>
                   </c:pt>
                   <c:pt idx="2">
-                    <c:v>英格蘭</c:v>
+                    <c:v>法國</c:v>
                   </c:pt>
                   <c:pt idx="3">
-                    <c:v>法國</c:v>
+                    <c:v>英格蘭</c:v>
                   </c:pt>
                   <c:pt idx="4">
                     <c:v>西班牙</c:v>
@@ -212,19 +212,19 @@
                     <c:v>比利時</c:v>
                   </c:pt>
                   <c:pt idx="6">
-                    <c:v>葡萄牙</c:v>
+                    <c:v>荷蘭</c:v>
                   </c:pt>
                   <c:pt idx="7">
-                    <c:v>荷蘭</c:v>
+                    <c:v>葡萄牙</c:v>
                   </c:pt>
                   <c:pt idx="8">
                     <c:v>德國</c:v>
                   </c:pt>
                   <c:pt idx="9">
-                    <c:v>哥倫比亞</c:v>
+                    <c:v>烏拉圭</c:v>
                   </c:pt>
                   <c:pt idx="10">
-                    <c:v>烏拉圭</c:v>
+                    <c:v>哥倫比亞</c:v>
                   </c:pt>
                   <c:pt idx="11">
                     <c:v>克羅埃西亞</c:v>
@@ -249,49 +249,49 @@
                 <c:formatCode>General</c:formatCode>
                 <c:ptCount val="15"/>
                 <c:pt idx="0">
-                  <c:v>6.14</c:v>
+                  <c:v>6.22</c:v>
                 </c:pt>
                 <c:pt idx="1">
-                  <c:v>6.01</c:v>
+                  <c:v>6.03</c:v>
                 </c:pt>
                 <c:pt idx="2">
-                  <c:v>5.8</c:v>
+                  <c:v>5.65</c:v>
                 </c:pt>
                 <c:pt idx="3">
-                  <c:v>5.75</c:v>
+                  <c:v>5.49</c:v>
                 </c:pt>
                 <c:pt idx="4">
                   <c:v>5.01</c:v>
                 </c:pt>
                 <c:pt idx="5">
-                  <c:v>4.99</c:v>
+                  <c:v>4.96</c:v>
                 </c:pt>
                 <c:pt idx="6">
-                  <c:v>4.65</c:v>
+                  <c:v>4.8</c:v>
                 </c:pt>
                 <c:pt idx="7">
-                  <c:v>4.62</c:v>
+                  <c:v>4.69</c:v>
                 </c:pt>
                 <c:pt idx="8">
-                  <c:v>4.44</c:v>
+                  <c:v>4.57</c:v>
                 </c:pt>
                 <c:pt idx="9">
-                  <c:v>3.41</c:v>
+                  <c:v>3.58</c:v>
                 </c:pt>
                 <c:pt idx="10">
-                  <c:v>3.39</c:v>
+                  <c:v>3.48</c:v>
                 </c:pt>
                 <c:pt idx="11">
-                  <c:v>3.3</c:v>
+                  <c:v>3.17</c:v>
                 </c:pt>
                 <c:pt idx="12">
                   <c:v>2.89</c:v>
                 </c:pt>
                 <c:pt idx="13">
-                  <c:v>2.78</c:v>
+                  <c:v>2.73</c:v>
                 </c:pt>
                 <c:pt idx="14">
-                  <c:v>2.57</c:v>
+                  <c:v>2.56</c:v>
                 </c:pt>
               </c:numCache>
             </c:numRef>
@@ -15034,7 +15034,7 @@
                           <a:ea typeface="Calibri" pitchFamily="34" charset="-122"/>
                           <a:cs typeface="Calibri" pitchFamily="34" charset="-120"/>
                         </a:rPr>
-                        <a:t>6.14%</a:t>
+                        <a:t>6.22%</a:t>
                       </a:r>
                       <a:endParaRPr lang="en-US" sz="1200" dirty="0">
                         <a:latin typeface="Calibri" charset="0"/>
@@ -15164,7 +15164,7 @@
                           <a:ea typeface="Calibri" pitchFamily="34" charset="-122"/>
                           <a:cs typeface="Calibri" pitchFamily="34" charset="-120"/>
                         </a:rPr>
-                        <a:t>77.6%</a:t>
+                        <a:t>77.3%</a:t>
                       </a:r>
                       <a:endParaRPr lang="en-US" sz="1200" dirty="0">
                         <a:latin typeface="Calibri" charset="0"/>
@@ -15361,7 +15361,7 @@
                           <a:ea typeface="Calibri" pitchFamily="34" charset="-122"/>
                           <a:cs typeface="Calibri" pitchFamily="34" charset="-120"/>
                         </a:rPr>
-                        <a:t>6.01%</a:t>
+                        <a:t>6.03%</a:t>
                       </a:r>
                       <a:endParaRPr lang="en-US" sz="1200" dirty="0">
                         <a:latin typeface="Calibri" charset="0"/>
@@ -15491,7 +15491,7 @@
                           <a:ea typeface="Calibri" pitchFamily="34" charset="-122"/>
                           <a:cs typeface="Calibri" pitchFamily="34" charset="-120"/>
                         </a:rPr>
-                        <a:t>77.5%</a:t>
+                        <a:t>77.4%</a:t>
                       </a:r>
                       <a:endParaRPr lang="en-US" sz="1200" dirty="0">
                         <a:latin typeface="Calibri" charset="0"/>
@@ -15623,7 +15623,7 @@
                           <a:ea typeface="Calibri" pitchFamily="34" charset="-122"/>
                           <a:cs typeface="Calibri" pitchFamily="34" charset="-120"/>
                         </a:rPr>
-                        <a:t>🏴󠁧󠁢󠁥󠁮󠁧󠁿 英格蘭   England</a:t>
+                        <a:t>🇫🇷 法國   France</a:t>
                       </a:r>
                       <a:endParaRPr lang="en-US" sz="1200" dirty="0">
                         <a:latin typeface="Calibri" charset="0"/>
@@ -15688,7 +15688,7 @@
                           <a:ea typeface="Calibri" pitchFamily="34" charset="-122"/>
                           <a:cs typeface="Calibri" pitchFamily="34" charset="-120"/>
                         </a:rPr>
-                        <a:t>5.80%</a:t>
+                        <a:t>5.65%</a:t>
                       </a:r>
                       <a:endParaRPr lang="en-US" sz="1200" dirty="0">
                         <a:latin typeface="Calibri" charset="0"/>
@@ -15753,7 +15753,7 @@
                           <a:ea typeface="Calibri" pitchFamily="34" charset="-122"/>
                           <a:cs typeface="Calibri" pitchFamily="34" charset="-120"/>
                         </a:rPr>
-                        <a:t>18.1%</a:t>
+                        <a:t>18.6%</a:t>
                       </a:r>
                       <a:endParaRPr lang="en-US" sz="1200" dirty="0">
                         <a:latin typeface="Calibri" charset="0"/>
@@ -15818,7 +15818,7 @@
                           <a:ea typeface="Calibri" pitchFamily="34" charset="-122"/>
                           <a:cs typeface="Calibri" pitchFamily="34" charset="-120"/>
                         </a:rPr>
-                        <a:t>76.2%</a:t>
+                        <a:t>76.6%</a:t>
                       </a:r>
                       <a:endParaRPr lang="en-US" sz="1200" dirty="0">
                         <a:latin typeface="Calibri" charset="0"/>
@@ -15950,7 +15950,7 @@
                           <a:ea typeface="Calibri" pitchFamily="34" charset="-122"/>
                           <a:cs typeface="Calibri" pitchFamily="34" charset="-120"/>
                         </a:rPr>
-                        <a:t>🇫🇷 法國   France</a:t>
+                        <a:t>🏴󠁧󠁢󠁥󠁮󠁧󠁿 英格蘭   England</a:t>
                       </a:r>
                       <a:endParaRPr lang="en-US" sz="1200" dirty="0">
                         <a:latin typeface="Calibri" charset="0"/>
@@ -16015,7 +16015,7 @@
                           <a:ea typeface="Calibri" pitchFamily="34" charset="-122"/>
                           <a:cs typeface="Calibri" pitchFamily="34" charset="-120"/>
                         </a:rPr>
-                        <a:t>5.75%</a:t>
+                        <a:t>5.49%</a:t>
                       </a:r>
                       <a:endParaRPr lang="en-US" sz="1200" dirty="0">
                         <a:latin typeface="Calibri" charset="0"/>
@@ -16080,7 +16080,7 @@
                           <a:ea typeface="Calibri" pitchFamily="34" charset="-122"/>
                           <a:cs typeface="Calibri" pitchFamily="34" charset="-120"/>
                         </a:rPr>
-                        <a:t>18.6%</a:t>
+                        <a:t>18.0%</a:t>
                       </a:r>
                       <a:endParaRPr lang="en-US" sz="1200" dirty="0">
                         <a:latin typeface="Calibri" charset="0"/>
@@ -16407,7 +16407,7 @@
                           <a:ea typeface="Calibri" pitchFamily="34" charset="-122"/>
                           <a:cs typeface="Calibri" pitchFamily="34" charset="-120"/>
                         </a:rPr>
-                        <a:t>16.7%</a:t>
+                        <a:t>16.5%</a:t>
                       </a:r>
                       <a:endParaRPr lang="en-US" sz="1200" dirty="0">
                         <a:latin typeface="Calibri" charset="0"/>
@@ -16669,7 +16669,7 @@
                           <a:ea typeface="Calibri" pitchFamily="34" charset="-122"/>
                           <a:cs typeface="Calibri" pitchFamily="34" charset="-120"/>
                         </a:rPr>
-                        <a:t>4.99%</a:t>
+                        <a:t>4.96%</a:t>
                       </a:r>
                       <a:endParaRPr lang="en-US" sz="1200" dirty="0">
                         <a:latin typeface="Calibri" charset="0"/>
@@ -16734,7 +16734,7 @@
                           <a:ea typeface="Calibri" pitchFamily="34" charset="-122"/>
                           <a:cs typeface="Calibri" pitchFamily="34" charset="-120"/>
                         </a:rPr>
-                        <a:t>16.4%</a:t>
+                        <a:t>16.5%</a:t>
                       </a:r>
                       <a:endParaRPr lang="en-US" sz="1200" dirty="0">
                         <a:latin typeface="Calibri" charset="0"/>
@@ -16799,7 +16799,7 @@
                           <a:ea typeface="Calibri" pitchFamily="34" charset="-122"/>
                           <a:cs typeface="Calibri" pitchFamily="34" charset="-120"/>
                         </a:rPr>
-                        <a:t>76.5%</a:t>
+                        <a:t>76.3%</a:t>
                       </a:r>
                       <a:endParaRPr lang="en-US" sz="1200" dirty="0">
                         <a:latin typeface="Calibri" charset="0"/>
@@ -16931,7 +16931,7 @@
                           <a:ea typeface="Calibri" pitchFamily="34" charset="-122"/>
                           <a:cs typeface="Calibri" pitchFamily="34" charset="-120"/>
                         </a:rPr>
-                        <a:t>🇵🇹 葡萄牙   Portugal</a:t>
+                        <a:t>🇳🇱 荷蘭   Netherlands</a:t>
                       </a:r>
                       <a:endParaRPr lang="en-US" sz="1200" dirty="0">
                         <a:latin typeface="Calibri" charset="0"/>
@@ -16996,7 +16996,7 @@
                           <a:ea typeface="Calibri" pitchFamily="34" charset="-122"/>
                           <a:cs typeface="Calibri" pitchFamily="34" charset="-120"/>
                         </a:rPr>
-                        <a:t>4.65%</a:t>
+                        <a:t>4.80%</a:t>
                       </a:r>
                       <a:endParaRPr lang="en-US" sz="1200" dirty="0">
                         <a:latin typeface="Calibri" charset="0"/>
@@ -17061,7 +17061,7 @@
                           <a:ea typeface="Calibri" pitchFamily="34" charset="-122"/>
                           <a:cs typeface="Calibri" pitchFamily="34" charset="-120"/>
                         </a:rPr>
-                        <a:t>15.6%</a:t>
+                        <a:t>15.8%</a:t>
                       </a:r>
                       <a:endParaRPr lang="en-US" sz="1200" dirty="0">
                         <a:latin typeface="Calibri" charset="0"/>
@@ -17126,7 +17126,7 @@
                           <a:ea typeface="Calibri" pitchFamily="34" charset="-122"/>
                           <a:cs typeface="Calibri" pitchFamily="34" charset="-120"/>
                         </a:rPr>
-                        <a:t>75.8%</a:t>
+                        <a:t>73.0%</a:t>
                       </a:r>
                       <a:endParaRPr lang="en-US" sz="1200" dirty="0">
                         <a:latin typeface="Calibri" charset="0"/>
@@ -17258,7 +17258,7 @@
                           <a:ea typeface="Calibri" pitchFamily="34" charset="-122"/>
                           <a:cs typeface="Calibri" pitchFamily="34" charset="-120"/>
                         </a:rPr>
-                        <a:t>🇳🇱 荷蘭   Netherlands</a:t>
+                        <a:t>🇵🇹 葡萄牙   Portugal</a:t>
                       </a:r>
                       <a:endParaRPr lang="en-US" sz="1200" dirty="0">
                         <a:latin typeface="Calibri" charset="0"/>
@@ -17323,7 +17323,7 @@
                           <a:ea typeface="Calibri" pitchFamily="34" charset="-122"/>
                           <a:cs typeface="Calibri" pitchFamily="34" charset="-120"/>
                         </a:rPr>
-                        <a:t>4.62%</a:t>
+                        <a:t>4.69%</a:t>
                       </a:r>
                       <a:endParaRPr lang="en-US" sz="1200" dirty="0">
                         <a:latin typeface="Calibri" charset="0"/>
@@ -17453,7 +17453,7 @@
                           <a:ea typeface="Calibri" pitchFamily="34" charset="-122"/>
                           <a:cs typeface="Calibri" pitchFamily="34" charset="-120"/>
                         </a:rPr>
-                        <a:t>72.8%</a:t>
+                        <a:t>75.7%</a:t>
                       </a:r>
                       <a:endParaRPr lang="en-US" sz="1200" dirty="0">
                         <a:latin typeface="Calibri" charset="0"/>
@@ -17650,7 +17650,7 @@
                           <a:ea typeface="Calibri" pitchFamily="34" charset="-122"/>
                           <a:cs typeface="Calibri" pitchFamily="34" charset="-120"/>
                         </a:rPr>
-                        <a:t>4.44%</a:t>
+                        <a:t>4.57%</a:t>
                       </a:r>
                       <a:endParaRPr lang="en-US" sz="1200" dirty="0">
                         <a:latin typeface="Calibri" charset="0"/>
@@ -17715,7 +17715,7 @@
                           <a:ea typeface="Calibri" pitchFamily="34" charset="-122"/>
                           <a:cs typeface="Calibri" pitchFamily="34" charset="-120"/>
                         </a:rPr>
-                        <a:t>15.8%</a:t>
+                        <a:t>16.0%</a:t>
                       </a:r>
                       <a:endParaRPr lang="en-US" sz="1200" dirty="0">
                         <a:latin typeface="Calibri" charset="0"/>
@@ -17780,7 +17780,7 @@
                           <a:ea typeface="Calibri" pitchFamily="34" charset="-122"/>
                           <a:cs typeface="Calibri" pitchFamily="34" charset="-120"/>
                         </a:rPr>
-                        <a:t>76.2%</a:t>
+                        <a:t>75.9%</a:t>
                       </a:r>
                       <a:endParaRPr lang="en-US" sz="1200" dirty="0">
                         <a:latin typeface="Calibri" charset="0"/>
@@ -17912,7 +17912,7 @@
                           <a:ea typeface="Calibri" pitchFamily="34" charset="-122"/>
                           <a:cs typeface="Calibri" pitchFamily="34" charset="-120"/>
                         </a:rPr>
-                        <a:t>🇨🇴 哥倫比亞   Colombia</a:t>
+                        <a:t>🇺🇾 烏拉圭   Uruguay</a:t>
                       </a:r>
                       <a:endParaRPr lang="en-US" sz="1200" dirty="0">
                         <a:latin typeface="Calibri" charset="0"/>
@@ -17977,7 +17977,7 @@
                           <a:ea typeface="Calibri" pitchFamily="34" charset="-122"/>
                           <a:cs typeface="Calibri" pitchFamily="34" charset="-120"/>
                         </a:rPr>
-                        <a:t>3.41%</a:t>
+                        <a:t>3.58%</a:t>
                       </a:r>
                       <a:endParaRPr lang="en-US" sz="1200" dirty="0">
                         <a:latin typeface="Calibri" charset="0"/>
@@ -18042,7 +18042,7 @@
                           <a:ea typeface="Calibri" pitchFamily="34" charset="-122"/>
                           <a:cs typeface="Calibri" pitchFamily="34" charset="-120"/>
                         </a:rPr>
-                        <a:t>12.2%</a:t>
+                        <a:t>13.6%</a:t>
                       </a:r>
                       <a:endParaRPr lang="en-US" sz="1200" dirty="0">
                         <a:latin typeface="Calibri" charset="0"/>
@@ -18107,7 +18107,7 @@
                           <a:ea typeface="Calibri" pitchFamily="34" charset="-122"/>
                           <a:cs typeface="Calibri" pitchFamily="34" charset="-120"/>
                         </a:rPr>
-                        <a:t>62.4%</a:t>
+                        <a:t>64.2%</a:t>
                       </a:r>
                       <a:endParaRPr lang="en-US" sz="1200" dirty="0">
                         <a:latin typeface="Calibri" charset="0"/>
@@ -23702,7 +23702,7 @@
                 <a:ea typeface="Calibri" pitchFamily="34" charset="-122"/>
                 <a:cs typeface="Calibri" pitchFamily="34" charset="-120"/>
               </a:rPr>
-              <a:t>阿根廷 6.14% / 巴西 6.01% / 英格蘭 5.80% / 法國 5.75% — 前 10 累計約 50%。符合世界盃高度不確定性的本質，沒有出現單一球隊獨大的失真。</a:t>
+              <a:t>阿根廷 6.22% / 巴西 6.03% / 法國 5.65% / 英格蘭 5.49% — 前 10 累計約 51%。符合世界盃高度不確定性的本質，沒有出現單一球隊獨大的失真。</a:t>
             </a:r>
             <a:endParaRPr lang="en-US" sz="1100" dirty="0"/>
           </a:p>
